--- a/docs/user_guide.pptx
+++ b/docs/user_guide.pptx
@@ -2263,7 +2263,7 @@
                   <a:schemeClr val="accent6"/>
                 </a:solidFill>
               </a:rPr>
-              <a:t>2026-10-02 기준</a:t>
+              <a:t>2026-10-12 기준</a:t>
             </a:r>
             <a:endParaRPr lang="en-US" sz="1100" dirty="0"/>
           </a:p>
@@ -3539,7 +3539,7 @@
                             <a:srgbClr val="1B2430"/>
                           </a:solidFill>
                         </a:rPr>
-                        <a:t>자동 수집 · 텔레그램 보고서</a:t>
+                        <a:t>자동 수집 · 자동 발송</a:t>
                       </a:r>
                       <a:endParaRPr lang="en-US" sz="1200" dirty="0"/>
                     </a:p>
@@ -3597,7 +3597,7 @@
                             <a:srgbClr val="1B2430"/>
                           </a:solidFill>
                         </a:rPr>
-                        <a:t>기능을 다 다듬은 뒤 매일·매주 자동으로 불러와 텔레그램으로 보고</a:t>
+                        <a:t>텔레그램 보내기는 지금 버튼으로 가능. 기능을 다 다듬은 뒤 매일·매주 자동 수집·발송을 켤 예정</a:t>
                       </a:r>
                       <a:endParaRPr lang="en-US" sz="1200" dirty="0"/>
                     </a:p>
@@ -6829,6 +6829,24 @@
                 </a:solidFill>
               </a:rPr>
               <a:t>참가/불참 기록은 키워드를 고치는 근거가 됩니다</a:t>
+            </a:r>
+            <a:endParaRPr lang="en-US" sz="1300" dirty="0"/>
+          </a:p>
+          <a:p>
+            <a:pPr marL="342900" indent="-342900">
+              <a:spcAft>
+                <a:spcPts val="600"/>
+              </a:spcAft>
+              <a:buSzPct val="100000"/>
+              <a:buChar char="•"/>
+            </a:pPr>
+            <a:r>
+              <a:rPr lang="en-US" sz="1300" dirty="0">
+                <a:solidFill>
+                  <a:schemeClr val="tx1"/>
+                </a:solidFill>
+              </a:rPr>
+              <a:t>"텔레그램 보내기" 버튼: 지금 보는 후보 목록을 팀 텔레그램 방으로 보고서처럼 보냄</a:t>
             </a:r>
             <a:endParaRPr lang="en-US" sz="1300" dirty="0"/>
           </a:p>

--- a/docs/user_guide.pptx
+++ b/docs/user_guide.pptx
@@ -3539,7 +3539,7 @@
                             <a:srgbClr val="1B2430"/>
                           </a:solidFill>
                         </a:rPr>
-                        <a:t>자동 수집 · 자동 발송</a:t>
+                        <a:t>텔레그램 보고서</a:t>
                       </a:r>
                       <a:endParaRPr lang="en-US" sz="1200" dirty="0"/>
                     </a:p>
@@ -3597,7 +3597,7 @@
                             <a:srgbClr val="1B2430"/>
                           </a:solidFill>
                         </a:rPr>
-                        <a:t>텔레그램 보내기는 지금 버튼으로 가능. 기능을 다 다듬은 뒤 매일·매주 자동 수집·발송을 켤 예정</a:t>
+                        <a:t>입찰 공고는 매일 아침 8시, 협상·규격가격동시입찰·사전규격은 매주 월요일 아침 자동 발송 (메시지 모양 다듬는 중)</a:t>
                       </a:r>
                       <a:endParaRPr lang="en-US" sz="1200" dirty="0"/>
                     </a:p>
@@ -6829,24 +6829,6 @@
                 </a:solidFill>
               </a:rPr>
               <a:t>참가/불참 기록은 키워드를 고치는 근거가 됩니다</a:t>
-            </a:r>
-            <a:endParaRPr lang="en-US" sz="1300" dirty="0"/>
-          </a:p>
-          <a:p>
-            <a:pPr marL="342900" indent="-342900">
-              <a:spcAft>
-                <a:spcPts val="600"/>
-              </a:spcAft>
-              <a:buSzPct val="100000"/>
-              <a:buChar char="•"/>
-            </a:pPr>
-            <a:r>
-              <a:rPr lang="en-US" sz="1300" dirty="0">
-                <a:solidFill>
-                  <a:schemeClr val="tx1"/>
-                </a:solidFill>
-              </a:rPr>
-              <a:t>"텔레그램 보내기" 버튼: 지금 보는 후보 목록을 팀 텔레그램 방으로 보고서처럼 보냄</a:t>
             </a:r>
             <a:endParaRPr lang="en-US" sz="1300" dirty="0"/>
           </a:p>
